--- a/skills/presentation-template-library/skills/artifact-template-coral-growth-brief/assets/reference.pptx
+++ b/skills/presentation-template-library/skills/artifact-template-coral-growth-brief/assets/reference.pptx
@@ -2375,7 +2375,7 @@
         </p:xfrm>
         <a:graphic xmlns:a="http://schemas.openxmlformats.org/drawingml/2006/main">
           <a:graphicData uri="http://schemas.openxmlformats.org/drawingml/2006/chart">
-            <c:chart xmlns:r="http://schemas.openxmlformats.org/officeDocument/2006/relationships" xmlns:c="http://schemas.openxmlformats.org/drawingml/2006/chart" r:id="Rfcc70c6dd9434ec5"/>
+            <c:chart xmlns:r="http://schemas.openxmlformats.org/officeDocument/2006/relationships" xmlns:c="http://schemas.openxmlformats.org/drawingml/2006/chart" r:id="R7afcded34c2e4a25"/>
           </a:graphicData>
         </a:graphic>
       </p:graphicFrame>
@@ -2393,7 +2393,7 @@
         </p:xfrm>
         <a:graphic xmlns:a="http://schemas.openxmlformats.org/drawingml/2006/main">
           <a:graphicData uri="http://schemas.openxmlformats.org/drawingml/2006/chart">
-            <c:chart xmlns:r="http://schemas.openxmlformats.org/officeDocument/2006/relationships" xmlns:c="http://schemas.openxmlformats.org/drawingml/2006/chart" r:id="Ra4e115a0a407496d"/>
+            <c:chart xmlns:r="http://schemas.openxmlformats.org/officeDocument/2006/relationships" xmlns:c="http://schemas.openxmlformats.org/drawingml/2006/chart" r:id="R2a8724017eec4aa0"/>
           </a:graphicData>
         </a:graphic>
       </p:graphicFrame>

--- a/skills/presentation-template-library/skills/artifact-template-coral-growth-brief/assets/reference.pptx
+++ b/skills/presentation-template-library/skills/artifact-template-coral-growth-brief/assets/reference.pptx
@@ -2375,7 +2375,7 @@
         </p:xfrm>
         <a:graphic xmlns:a="http://schemas.openxmlformats.org/drawingml/2006/main">
           <a:graphicData uri="http://schemas.openxmlformats.org/drawingml/2006/chart">
-            <c:chart xmlns:r="http://schemas.openxmlformats.org/officeDocument/2006/relationships" xmlns:c="http://schemas.openxmlformats.org/drawingml/2006/chart" r:id="R7afcded34c2e4a25"/>
+            <c:chart xmlns:r="http://schemas.openxmlformats.org/officeDocument/2006/relationships" xmlns:c="http://schemas.openxmlformats.org/drawingml/2006/chart" r:id="Rc5cca8a1bac944f5"/>
           </a:graphicData>
         </a:graphic>
       </p:graphicFrame>
@@ -2393,7 +2393,7 @@
         </p:xfrm>
         <a:graphic xmlns:a="http://schemas.openxmlformats.org/drawingml/2006/main">
           <a:graphicData uri="http://schemas.openxmlformats.org/drawingml/2006/chart">
-            <c:chart xmlns:r="http://schemas.openxmlformats.org/officeDocument/2006/relationships" xmlns:c="http://schemas.openxmlformats.org/drawingml/2006/chart" r:id="R2a8724017eec4aa0"/>
+            <c:chart xmlns:r="http://schemas.openxmlformats.org/officeDocument/2006/relationships" xmlns:c="http://schemas.openxmlformats.org/drawingml/2006/chart" r:id="R0b48a82833df4d8e"/>
           </a:graphicData>
         </a:graphic>
       </p:graphicFrame>

--- a/skills/presentation-template-library/skills/artifact-template-coral-growth-brief/assets/reference.pptx
+++ b/skills/presentation-template-library/skills/artifact-template-coral-growth-brief/assets/reference.pptx
@@ -2375,7 +2375,7 @@
         </p:xfrm>
         <a:graphic xmlns:a="http://schemas.openxmlformats.org/drawingml/2006/main">
           <a:graphicData uri="http://schemas.openxmlformats.org/drawingml/2006/chart">
-            <c:chart xmlns:r="http://schemas.openxmlformats.org/officeDocument/2006/relationships" xmlns:c="http://schemas.openxmlformats.org/drawingml/2006/chart" r:id="Rc5cca8a1bac944f5"/>
+            <c:chart xmlns:r="http://schemas.openxmlformats.org/officeDocument/2006/relationships" xmlns:c="http://schemas.openxmlformats.org/drawingml/2006/chart" r:id="Rd5b06ce795284e08"/>
           </a:graphicData>
         </a:graphic>
       </p:graphicFrame>
@@ -2393,7 +2393,7 @@
         </p:xfrm>
         <a:graphic xmlns:a="http://schemas.openxmlformats.org/drawingml/2006/main">
           <a:graphicData uri="http://schemas.openxmlformats.org/drawingml/2006/chart">
-            <c:chart xmlns:r="http://schemas.openxmlformats.org/officeDocument/2006/relationships" xmlns:c="http://schemas.openxmlformats.org/drawingml/2006/chart" r:id="R0b48a82833df4d8e"/>
+            <c:chart xmlns:r="http://schemas.openxmlformats.org/officeDocument/2006/relationships" xmlns:c="http://schemas.openxmlformats.org/drawingml/2006/chart" r:id="R441c34f42cd14135"/>
           </a:graphicData>
         </a:graphic>
       </p:graphicFrame>

--- a/skills/presentation-template-library/skills/artifact-template-coral-growth-brief/assets/reference.pptx
+++ b/skills/presentation-template-library/skills/artifact-template-coral-growth-brief/assets/reference.pptx
@@ -194,290 +194,6 @@
 </a:theme>
 </file>
 
-<file path=ppt/slides/charts/chart1.xml><?xml version="1.0" encoding="utf-8"?>
-<c:chartSpace xmlns:c="http://schemas.openxmlformats.org/drawingml/2006/chart" xmlns:a="http://schemas.openxmlformats.org/drawingml/2006/main">
-  <c:chart>
-    <c:title>
-      <c:tx>
-        <c:rich>
-          <a:bodyPr/>
-          <a:lstStyle/>
-          <a:p>
-            <a:r>
-              <a:t>Primary signal · observed versus reference</a:t>
-            </a:r>
-          </a:p>
-        </c:rich>
-      </c:tx>
-      <c:layout/>
-    </c:title>
-    <c:plotArea>
-      <c:layout/>
-      <c:barChart>
-        <c:barDir val="col"/>
-        <c:grouping val="clustered"/>
-        <c:ser>
-          <c:idx val="0"/>
-          <c:order val="0"/>
-          <c:tx>
-            <c:v>Observed</c:v>
-          </c:tx>
-          <c:spPr>
-            <a:solidFill>
-              <a:srgbClr val="E2534B"/>
-            </a:solidFill>
-          </c:spPr>
-          <c:cat>
-            <c:strLit>
-              <c:ptCount val="6"/>
-              <c:pt idx="0">
-                <c:v>Q1</c:v>
-              </c:pt>
-              <c:pt idx="1">
-                <c:v>Q2</c:v>
-              </c:pt>
-              <c:pt idx="2">
-                <c:v>Q3</c:v>
-              </c:pt>
-              <c:pt idx="3">
-                <c:v>Q4</c:v>
-              </c:pt>
-              <c:pt idx="4">
-                <c:v>Q5</c:v>
-              </c:pt>
-              <c:pt idx="5">
-                <c:v>Q6</c:v>
-              </c:pt>
-            </c:strLit>
-          </c:cat>
-          <c:val>
-            <c:numLit>
-              <c:formatCode>General</c:formatCode>
-              <c:ptCount val="6"/>
-              <c:pt idx="0">
-                <c:v>38</c:v>
-              </c:pt>
-              <c:pt idx="1">
-                <c:v>46</c:v>
-              </c:pt>
-              <c:pt idx="2">
-                <c:v>43</c:v>
-              </c:pt>
-              <c:pt idx="3">
-                <c:v>58</c:v>
-              </c:pt>
-              <c:pt idx="4">
-                <c:v>68</c:v>
-              </c:pt>
-              <c:pt idx="5">
-                <c:v>74</c:v>
-              </c:pt>
-            </c:numLit>
-          </c:val>
-        </c:ser>
-        <c:ser>
-          <c:idx val="1"/>
-          <c:order val="1"/>
-          <c:tx>
-            <c:v>Reference</c:v>
-          </c:tx>
-          <c:spPr>
-            <a:solidFill>
-              <a:srgbClr val="90908F"/>
-            </a:solidFill>
-          </c:spPr>
-          <c:cat>
-            <c:strLit>
-              <c:ptCount val="6"/>
-              <c:pt idx="0">
-                <c:v>Q1</c:v>
-              </c:pt>
-              <c:pt idx="1">
-                <c:v>Q2</c:v>
-              </c:pt>
-              <c:pt idx="2">
-                <c:v>Q3</c:v>
-              </c:pt>
-              <c:pt idx="3">
-                <c:v>Q4</c:v>
-              </c:pt>
-              <c:pt idx="4">
-                <c:v>Q5</c:v>
-              </c:pt>
-              <c:pt idx="5">
-                <c:v>Q6</c:v>
-              </c:pt>
-            </c:strLit>
-          </c:cat>
-          <c:val>
-            <c:numLit>
-              <c:formatCode>General</c:formatCode>
-              <c:ptCount val="6"/>
-              <c:pt idx="0">
-                <c:v>34</c:v>
-              </c:pt>
-              <c:pt idx="1">
-                <c:v>39</c:v>
-              </c:pt>
-              <c:pt idx="2">
-                <c:v>41</c:v>
-              </c:pt>
-              <c:pt idx="3">
-                <c:v>45</c:v>
-              </c:pt>
-              <c:pt idx="4">
-                <c:v>49</c:v>
-              </c:pt>
-              <c:pt idx="5">
-                <c:v>52</c:v>
-              </c:pt>
-            </c:numLit>
-          </c:val>
-        </c:ser>
-        <c:axId val="1"/>
-        <c:axId val="2"/>
-      </c:barChart>
-      <c:catAx>
-        <c:axId val="1"/>
-        <c:scaling>
-          <c:orientation val="minMax"/>
-        </c:scaling>
-        <c:axPos val="b"/>
-        <c:crossAx val="2"/>
-      </c:catAx>
-      <c:valAx>
-        <c:axId val="2"/>
-        <c:scaling>
-          <c:orientation val="minMax"/>
-        </c:scaling>
-        <c:axPos val="l"/>
-        <c:crossAx val="1"/>
-      </c:valAx>
-    </c:plotArea>
-    <c:legend>
-      <c:legendPos val="r"/>
-      <c:layout/>
-    </c:legend>
-    <c:plotVisOnly val="1"/>
-  </c:chart>
-</c:chartSpace>
-</file>
-
-<file path=ppt/slides/charts/chart2.xml><?xml version="1.0" encoding="utf-8"?>
-<c:chartSpace xmlns:c="http://schemas.openxmlformats.org/drawingml/2006/chart" xmlns:a="http://schemas.openxmlformats.org/drawingml/2006/main">
-  <c:chart>
-    <c:title>
-      <c:tx>
-        <c:rich>
-          <a:bodyPr/>
-          <a:lstStyle/>
-          <a:p>
-            <a:r>
-              <a:t>Driver trend</a:t>
-            </a:r>
-          </a:p>
-        </c:rich>
-      </c:tx>
-      <c:layout/>
-    </c:title>
-    <c:plotArea>
-      <c:layout/>
-      <c:lineChart>
-        <c:grouping val="standard"/>
-        <c:ser>
-          <c:idx val="0"/>
-          <c:order val="0"/>
-          <c:tx>
-            <c:v>Driver</c:v>
-          </c:tx>
-          <c:spPr>
-            <a:solidFill>
-              <a:srgbClr val="72787F"/>
-            </a:solidFill>
-            <a:ln w="38100">
-              <a:solidFill>
-                <a:srgbClr val="72787F"/>
-              </a:solidFill>
-              <a:prstDash val="solid"/>
-            </a:ln>
-          </c:spPr>
-          <c:marker>
-            <c:symbol val="circle"/>
-            <c:size val="6"/>
-          </c:marker>
-          <c:cat>
-            <c:strLit>
-              <c:ptCount val="6"/>
-              <c:pt idx="0">
-                <c:v>Q1</c:v>
-              </c:pt>
-              <c:pt idx="1">
-                <c:v>Q2</c:v>
-              </c:pt>
-              <c:pt idx="2">
-                <c:v>Q3</c:v>
-              </c:pt>
-              <c:pt idx="3">
-                <c:v>Q4</c:v>
-              </c:pt>
-              <c:pt idx="4">
-                <c:v>Q5</c:v>
-              </c:pt>
-              <c:pt idx="5">
-                <c:v>Q6</c:v>
-              </c:pt>
-            </c:strLit>
-          </c:cat>
-          <c:val>
-            <c:numLit>
-              <c:formatCode>General</c:formatCode>
-              <c:ptCount val="6"/>
-              <c:pt idx="0">
-                <c:v>22</c:v>
-              </c:pt>
-              <c:pt idx="1">
-                <c:v>28</c:v>
-              </c:pt>
-              <c:pt idx="2">
-                <c:v>34</c:v>
-              </c:pt>
-              <c:pt idx="3">
-                <c:v>39</c:v>
-              </c:pt>
-              <c:pt idx="4">
-                <c:v>45</c:v>
-              </c:pt>
-              <c:pt idx="5">
-                <c:v>51</c:v>
-              </c:pt>
-            </c:numLit>
-          </c:val>
-        </c:ser>
-        <c:axId val="1"/>
-        <c:axId val="2"/>
-      </c:lineChart>
-      <c:catAx>
-        <c:axId val="1"/>
-        <c:scaling>
-          <c:orientation val="minMax"/>
-        </c:scaling>
-        <c:axPos val="b"/>
-        <c:crossAx val="2"/>
-      </c:catAx>
-      <c:valAx>
-        <c:axId val="2"/>
-        <c:scaling>
-          <c:orientation val="minMax"/>
-        </c:scaling>
-        <c:axPos val="l"/>
-        <c:crossAx val="1"/>
-      </c:valAx>
-    </c:plotArea>
-    <c:plotVisOnly val="1"/>
-  </c:chart>
-</c:chartSpace>
-</file>
-
 <file path=ppt/slides/slide1.xml><?xml version="1.0" encoding="utf-8"?>
 <p:sld xmlns:p="http://schemas.openxmlformats.org/presentationml/2006/main">
   <p:cSld name="Opening claim">
@@ -2361,58 +2077,695 @@
           </a:p>
         </p:txBody>
       </p:sp>
-      <p:graphicFrame>
-        <p:nvGraphicFramePr>
-          <p:cNvPr id="8" name="dense-primary-chart"/>
-          <p:cNvGraphicFramePr>
-            <a:graphicFrameLocks xmlns:a="http://schemas.openxmlformats.org/drawingml/2006/main" noGrp="1"/>
-          </p:cNvGraphicFramePr>
-          <p:nvPr/>
-        </p:nvGraphicFramePr>
-        <p:xfrm>
-          <a:off xmlns:a="http://schemas.openxmlformats.org/drawingml/2006/main" x="990600" y="3048000"/>
-          <a:ext xmlns:a="http://schemas.openxmlformats.org/drawingml/2006/main" cx="6286500" cy="2952750"/>
-        </p:xfrm>
-        <a:graphic xmlns:a="http://schemas.openxmlformats.org/drawingml/2006/main">
-          <a:graphicData uri="http://schemas.openxmlformats.org/drawingml/2006/chart">
-            <c:chart xmlns:r="http://schemas.openxmlformats.org/officeDocument/2006/relationships" xmlns:c="http://schemas.openxmlformats.org/drawingml/2006/chart" r:id="Rd5b06ce795284e08"/>
-          </a:graphicData>
-        </a:graphic>
-      </p:graphicFrame>
-      <p:graphicFrame>
-        <p:nvGraphicFramePr>
-          <p:cNvPr id="9" name="dense-secondary-chart"/>
-          <p:cNvGraphicFramePr>
-            <a:graphicFrameLocks xmlns:a="http://schemas.openxmlformats.org/drawingml/2006/main" noGrp="1"/>
-          </p:cNvGraphicFramePr>
-          <p:nvPr/>
-        </p:nvGraphicFramePr>
-        <p:xfrm>
-          <a:off xmlns:a="http://schemas.openxmlformats.org/drawingml/2006/main" x="7658100" y="3048000"/>
-          <a:ext xmlns:a="http://schemas.openxmlformats.org/drawingml/2006/main" cx="3143250" cy="2952750"/>
-        </p:xfrm>
-        <a:graphic xmlns:a="http://schemas.openxmlformats.org/drawingml/2006/main">
-          <a:graphicData uri="http://schemas.openxmlformats.org/drawingml/2006/chart">
-            <c:chart xmlns:r="http://schemas.openxmlformats.org/officeDocument/2006/relationships" xmlns:c="http://schemas.openxmlformats.org/drawingml/2006/chart" r:id="R441c34f42cd14135"/>
-          </a:graphicData>
-        </a:graphic>
-      </p:graphicFrame>
-      <p:sp>
-        <p:nvSpPr>
-          <p:cNvPr id="10" name="dense-read-rule"/>
+      <p:sp>
+        <p:nvSpPr>
+          <p:cNvPr id="8" name="timeline-label"/>
+          <p:cNvSpPr txBox="1"/>
+          <p:nvPr/>
+        </p:nvSpPr>
+        <p:spPr>
+          <a:xfrm xmlns:a="http://schemas.openxmlformats.org/drawingml/2006/main">
+            <a:off x="1066800" y="3238500"/>
+            <a:ext cx="4000500" cy="228600"/>
+          </a:xfrm>
+          <a:prstGeom xmlns:a="http://schemas.openxmlformats.org/drawingml/2006/main" prst="rect">
+            <a:avLst/>
+          </a:prstGeom>
+          <a:noFill xmlns:a="http://schemas.openxmlformats.org/drawingml/2006/main"/>
+          <a:ln xmlns:a="http://schemas.openxmlformats.org/drawingml/2006/main" w="0">
+            <a:noFill/>
+          </a:ln>
+        </p:spPr>
+        <p:txBody>
+          <a:bodyPr xmlns:a="http://schemas.openxmlformats.org/drawingml/2006/main" wrap="square" lIns="0" tIns="0" rIns="0" bIns="0" anchor="t"/>
+          <a:lstStyle xmlns:a="http://schemas.openxmlformats.org/drawingml/2006/main"/>
+          <a:p xmlns:a="http://schemas.openxmlformats.org/drawingml/2006/main">
+            <a:r>
+              <a:rPr lang="en-US" sz="1125" b="1">
+                <a:solidFill>
+                  <a:srgbClr val="E2534B"/>
+                </a:solidFill>
+                <a:latin typeface="Arial"/>
+                <a:ea typeface="Arial"/>
+              </a:rPr>
+              <a:t>EVOLUTION / TRANSITION</a:t>
+            </a:r>
+            <a:endParaRPr lang="en-US"/>
+          </a:p>
+        </p:txBody>
+      </p:sp>
+      <p:sp>
+        <p:nvSpPr>
+          <p:cNvPr id="9" name="timeline-axis"/>
           <p:cNvSpPr/>
           <p:nvPr/>
         </p:nvSpPr>
         <p:spPr>
           <a:xfrm xmlns:a="http://schemas.openxmlformats.org/drawingml/2006/main">
-            <a:off x="11315700" y="3314700"/>
-            <a:ext cx="2686050" cy="0"/>
+            <a:off x="1219200" y="4762500"/>
+            <a:ext cx="10287000" cy="0"/>
           </a:xfrm>
           <a:prstGeom xmlns:a="http://schemas.openxmlformats.org/drawingml/2006/main" prst="line">
             <a:avLst/>
           </a:prstGeom>
           <a:noFill xmlns:a="http://schemas.openxmlformats.org/drawingml/2006/main"/>
           <a:ln xmlns:a="http://schemas.openxmlformats.org/drawingml/2006/main" w="38100">
+            <a:solidFill>
+              <a:srgbClr val="90908F"/>
+            </a:solidFill>
+            <a:prstDash val="solid"/>
+          </a:ln>
+        </p:spPr>
+        <p:txBody>
+          <a:bodyPr xmlns:a="http://schemas.openxmlformats.org/drawingml/2006/main" wrap="square" lIns="0" tIns="0" rIns="0" bIns="0" anchor="t"/>
+          <a:lstStyle xmlns:a="http://schemas.openxmlformats.org/drawingml/2006/main"/>
+          <a:p xmlns:a="http://schemas.openxmlformats.org/drawingml/2006/main">
+            <a:r>
+              <a:rPr lang="en-US"/>
+              <a:t/>
+            </a:r>
+            <a:endParaRPr lang="en-US"/>
+          </a:p>
+        </p:txBody>
+      </p:sp>
+      <p:sp>
+        <p:nvSpPr>
+          <p:cNvPr id="10" name="timeline-node-0"/>
+          <p:cNvSpPr/>
+          <p:nvPr/>
+        </p:nvSpPr>
+        <p:spPr>
+          <a:xfrm xmlns:a="http://schemas.openxmlformats.org/drawingml/2006/main">
+            <a:off x="1066800" y="4610100"/>
+            <a:ext cx="304800" cy="304800"/>
+          </a:xfrm>
+          <a:prstGeom xmlns:a="http://schemas.openxmlformats.org/drawingml/2006/main" prst="ellipse">
+            <a:avLst/>
+          </a:prstGeom>
+          <a:solidFill xmlns:a="http://schemas.openxmlformats.org/drawingml/2006/main">
+            <a:srgbClr val="FFFFFF"/>
+          </a:solidFill>
+          <a:ln xmlns:a="http://schemas.openxmlformats.org/drawingml/2006/main" w="25400">
+            <a:solidFill>
+              <a:srgbClr val="181716"/>
+            </a:solidFill>
+            <a:prstDash val="solid"/>
+          </a:ln>
+        </p:spPr>
+        <p:txBody>
+          <a:bodyPr xmlns:a="http://schemas.openxmlformats.org/drawingml/2006/main" wrap="square" lIns="0" tIns="0" rIns="0" bIns="0" anchor="t"/>
+          <a:lstStyle xmlns:a="http://schemas.openxmlformats.org/drawingml/2006/main"/>
+          <a:p xmlns:a="http://schemas.openxmlformats.org/drawingml/2006/main">
+            <a:r>
+              <a:rPr lang="en-US"/>
+              <a:t/>
+            </a:r>
+            <a:endParaRPr lang="en-US"/>
+          </a:p>
+        </p:txBody>
+      </p:sp>
+      <p:sp>
+        <p:nvSpPr>
+          <p:cNvPr id="11" name="timeline-number-0"/>
+          <p:cNvSpPr txBox="1"/>
+          <p:nvPr/>
+        </p:nvSpPr>
+        <p:spPr>
+          <a:xfrm xmlns:a="http://schemas.openxmlformats.org/drawingml/2006/main">
+            <a:off x="952500" y="4076700"/>
+            <a:ext cx="533400" cy="190500"/>
+          </a:xfrm>
+          <a:prstGeom xmlns:a="http://schemas.openxmlformats.org/drawingml/2006/main" prst="rect">
+            <a:avLst/>
+          </a:prstGeom>
+          <a:noFill xmlns:a="http://schemas.openxmlformats.org/drawingml/2006/main"/>
+          <a:ln xmlns:a="http://schemas.openxmlformats.org/drawingml/2006/main" w="0">
+            <a:noFill/>
+          </a:ln>
+        </p:spPr>
+        <p:txBody>
+          <a:bodyPr xmlns:a="http://schemas.openxmlformats.org/drawingml/2006/main" wrap="square" lIns="0" tIns="0" rIns="0" bIns="0" anchor="t"/>
+          <a:lstStyle xmlns:a="http://schemas.openxmlformats.org/drawingml/2006/main"/>
+          <a:p xmlns:a="http://schemas.openxmlformats.org/drawingml/2006/main">
+            <a:pPr algn="ctr"/>
+            <a:r>
+              <a:rPr lang="en-US" sz="975" b="1">
+                <a:solidFill>
+                  <a:srgbClr val="E2534B"/>
+                </a:solidFill>
+                <a:latin typeface="Arial"/>
+                <a:ea typeface="Arial"/>
+              </a:rPr>
+              <a:t>01</a:t>
+            </a:r>
+            <a:endParaRPr lang="en-US"/>
+          </a:p>
+        </p:txBody>
+      </p:sp>
+      <p:sp>
+        <p:nvSpPr>
+          <p:cNvPr id="12" name="timeline-label-0"/>
+          <p:cNvSpPr txBox="1"/>
+          <p:nvPr/>
+        </p:nvSpPr>
+        <p:spPr>
+          <a:xfrm xmlns:a="http://schemas.openxmlformats.org/drawingml/2006/main">
+            <a:off x="533400" y="5086350"/>
+            <a:ext cx="1371600" cy="228600"/>
+          </a:xfrm>
+          <a:prstGeom xmlns:a="http://schemas.openxmlformats.org/drawingml/2006/main" prst="rect">
+            <a:avLst/>
+          </a:prstGeom>
+          <a:noFill xmlns:a="http://schemas.openxmlformats.org/drawingml/2006/main"/>
+          <a:ln xmlns:a="http://schemas.openxmlformats.org/drawingml/2006/main" w="0">
+            <a:noFill/>
+          </a:ln>
+        </p:spPr>
+        <p:txBody>
+          <a:bodyPr xmlns:a="http://schemas.openxmlformats.org/drawingml/2006/main" wrap="square" lIns="0" tIns="0" rIns="0" bIns="0" anchor="t"/>
+          <a:lstStyle xmlns:a="http://schemas.openxmlformats.org/drawingml/2006/main"/>
+          <a:p xmlns:a="http://schemas.openxmlformats.org/drawingml/2006/main">
+            <a:pPr algn="ctr"/>
+            <a:r>
+              <a:rPr lang="en-US" sz="1350" b="1">
+                <a:solidFill>
+                  <a:srgbClr val="181716"/>
+                </a:solidFill>
+                <a:latin typeface="Arial"/>
+                <a:ea typeface="Arial"/>
+              </a:rPr>
+              <a:t>Frame</a:t>
+            </a:r>
+            <a:endParaRPr lang="en-US"/>
+          </a:p>
+        </p:txBody>
+      </p:sp>
+      <p:sp>
+        <p:nvSpPr>
+          <p:cNvPr id="13" name="timeline-text-0"/>
+          <p:cNvSpPr txBox="1"/>
+          <p:nvPr/>
+        </p:nvSpPr>
+        <p:spPr>
+          <a:xfrm xmlns:a="http://schemas.openxmlformats.org/drawingml/2006/main">
+            <a:off x="323850" y="5391150"/>
+            <a:ext cx="1790700" cy="361950"/>
+          </a:xfrm>
+          <a:prstGeom xmlns:a="http://schemas.openxmlformats.org/drawingml/2006/main" prst="rect">
+            <a:avLst/>
+          </a:prstGeom>
+          <a:noFill xmlns:a="http://schemas.openxmlformats.org/drawingml/2006/main"/>
+          <a:ln xmlns:a="http://schemas.openxmlformats.org/drawingml/2006/main" w="0">
+            <a:noFill/>
+          </a:ln>
+        </p:spPr>
+        <p:txBody>
+          <a:bodyPr xmlns:a="http://schemas.openxmlformats.org/drawingml/2006/main" wrap="square" lIns="0" tIns="0" rIns="0" bIns="0" anchor="t"/>
+          <a:lstStyle xmlns:a="http://schemas.openxmlformats.org/drawingml/2006/main"/>
+          <a:p xmlns:a="http://schemas.openxmlformats.org/drawingml/2006/main">
+            <a:pPr algn="ctr"/>
+            <a:r>
+              <a:rPr lang="en-US" sz="1050">
+                <a:solidFill>
+                  <a:srgbClr val="90908F"/>
+                </a:solidFill>
+                <a:latin typeface="Arial"/>
+                <a:ea typeface="Arial"/>
+              </a:rPr>
+              <a:t>Name the question</a:t>
+            </a:r>
+            <a:endParaRPr lang="en-US"/>
+          </a:p>
+        </p:txBody>
+      </p:sp>
+      <p:sp>
+        <p:nvSpPr>
+          <p:cNvPr id="14" name="timeline-node-1"/>
+          <p:cNvSpPr/>
+          <p:nvPr/>
+        </p:nvSpPr>
+        <p:spPr>
+          <a:xfrm xmlns:a="http://schemas.openxmlformats.org/drawingml/2006/main">
+            <a:off x="3638550" y="4610100"/>
+            <a:ext cx="304800" cy="304800"/>
+          </a:xfrm>
+          <a:prstGeom xmlns:a="http://schemas.openxmlformats.org/drawingml/2006/main" prst="ellipse">
+            <a:avLst/>
+          </a:prstGeom>
+          <a:solidFill xmlns:a="http://schemas.openxmlformats.org/drawingml/2006/main">
+            <a:srgbClr val="FFFFFF"/>
+          </a:solidFill>
+          <a:ln xmlns:a="http://schemas.openxmlformats.org/drawingml/2006/main" w="25400">
+            <a:solidFill>
+              <a:srgbClr val="181716"/>
+            </a:solidFill>
+            <a:prstDash val="solid"/>
+          </a:ln>
+        </p:spPr>
+        <p:txBody>
+          <a:bodyPr xmlns:a="http://schemas.openxmlformats.org/drawingml/2006/main" wrap="square" lIns="0" tIns="0" rIns="0" bIns="0" anchor="t"/>
+          <a:lstStyle xmlns:a="http://schemas.openxmlformats.org/drawingml/2006/main"/>
+          <a:p xmlns:a="http://schemas.openxmlformats.org/drawingml/2006/main">
+            <a:r>
+              <a:rPr lang="en-US"/>
+              <a:t/>
+            </a:r>
+            <a:endParaRPr lang="en-US"/>
+          </a:p>
+        </p:txBody>
+      </p:sp>
+      <p:sp>
+        <p:nvSpPr>
+          <p:cNvPr id="15" name="timeline-number-1"/>
+          <p:cNvSpPr txBox="1"/>
+          <p:nvPr/>
+        </p:nvSpPr>
+        <p:spPr>
+          <a:xfrm xmlns:a="http://schemas.openxmlformats.org/drawingml/2006/main">
+            <a:off x="3524250" y="4076700"/>
+            <a:ext cx="533400" cy="190500"/>
+          </a:xfrm>
+          <a:prstGeom xmlns:a="http://schemas.openxmlformats.org/drawingml/2006/main" prst="rect">
+            <a:avLst/>
+          </a:prstGeom>
+          <a:noFill xmlns:a="http://schemas.openxmlformats.org/drawingml/2006/main"/>
+          <a:ln xmlns:a="http://schemas.openxmlformats.org/drawingml/2006/main" w="0">
+            <a:noFill/>
+          </a:ln>
+        </p:spPr>
+        <p:txBody>
+          <a:bodyPr xmlns:a="http://schemas.openxmlformats.org/drawingml/2006/main" wrap="square" lIns="0" tIns="0" rIns="0" bIns="0" anchor="t"/>
+          <a:lstStyle xmlns:a="http://schemas.openxmlformats.org/drawingml/2006/main"/>
+          <a:p xmlns:a="http://schemas.openxmlformats.org/drawingml/2006/main">
+            <a:pPr algn="ctr"/>
+            <a:r>
+              <a:rPr lang="en-US" sz="975" b="1">
+                <a:solidFill>
+                  <a:srgbClr val="E2534B"/>
+                </a:solidFill>
+                <a:latin typeface="Arial"/>
+                <a:ea typeface="Arial"/>
+              </a:rPr>
+              <a:t>02</a:t>
+            </a:r>
+            <a:endParaRPr lang="en-US"/>
+          </a:p>
+        </p:txBody>
+      </p:sp>
+      <p:sp>
+        <p:nvSpPr>
+          <p:cNvPr id="16" name="timeline-label-1"/>
+          <p:cNvSpPr txBox="1"/>
+          <p:nvPr/>
+        </p:nvSpPr>
+        <p:spPr>
+          <a:xfrm xmlns:a="http://schemas.openxmlformats.org/drawingml/2006/main">
+            <a:off x="3105150" y="5086350"/>
+            <a:ext cx="1371600" cy="228600"/>
+          </a:xfrm>
+          <a:prstGeom xmlns:a="http://schemas.openxmlformats.org/drawingml/2006/main" prst="rect">
+            <a:avLst/>
+          </a:prstGeom>
+          <a:noFill xmlns:a="http://schemas.openxmlformats.org/drawingml/2006/main"/>
+          <a:ln xmlns:a="http://schemas.openxmlformats.org/drawingml/2006/main" w="0">
+            <a:noFill/>
+          </a:ln>
+        </p:spPr>
+        <p:txBody>
+          <a:bodyPr xmlns:a="http://schemas.openxmlformats.org/drawingml/2006/main" wrap="square" lIns="0" tIns="0" rIns="0" bIns="0" anchor="t"/>
+          <a:lstStyle xmlns:a="http://schemas.openxmlformats.org/drawingml/2006/main"/>
+          <a:p xmlns:a="http://schemas.openxmlformats.org/drawingml/2006/main">
+            <a:pPr algn="ctr"/>
+            <a:r>
+              <a:rPr lang="en-US" sz="1350" b="1">
+                <a:solidFill>
+                  <a:srgbClr val="181716"/>
+                </a:solidFill>
+                <a:latin typeface="Arial"/>
+                <a:ea typeface="Arial"/>
+              </a:rPr>
+              <a:t>Test</a:t>
+            </a:r>
+            <a:endParaRPr lang="en-US"/>
+          </a:p>
+        </p:txBody>
+      </p:sp>
+      <p:sp>
+        <p:nvSpPr>
+          <p:cNvPr id="17" name="timeline-text-1"/>
+          <p:cNvSpPr txBox="1"/>
+          <p:nvPr/>
+        </p:nvSpPr>
+        <p:spPr>
+          <a:xfrm xmlns:a="http://schemas.openxmlformats.org/drawingml/2006/main">
+            <a:off x="2895600" y="5391150"/>
+            <a:ext cx="1790700" cy="361950"/>
+          </a:xfrm>
+          <a:prstGeom xmlns:a="http://schemas.openxmlformats.org/drawingml/2006/main" prst="rect">
+            <a:avLst/>
+          </a:prstGeom>
+          <a:noFill xmlns:a="http://schemas.openxmlformats.org/drawingml/2006/main"/>
+          <a:ln xmlns:a="http://schemas.openxmlformats.org/drawingml/2006/main" w="0">
+            <a:noFill/>
+          </a:ln>
+        </p:spPr>
+        <p:txBody>
+          <a:bodyPr xmlns:a="http://schemas.openxmlformats.org/drawingml/2006/main" wrap="square" lIns="0" tIns="0" rIns="0" bIns="0" anchor="t"/>
+          <a:lstStyle xmlns:a="http://schemas.openxmlformats.org/drawingml/2006/main"/>
+          <a:p xmlns:a="http://schemas.openxmlformats.org/drawingml/2006/main">
+            <a:pPr algn="ctr"/>
+            <a:r>
+              <a:rPr lang="en-US" sz="1050">
+                <a:solidFill>
+                  <a:srgbClr val="90908F"/>
+                </a:solidFill>
+                <a:latin typeface="Arial"/>
+                <a:ea typeface="Arial"/>
+              </a:rPr>
+              <a:t>Hold the rule</a:t>
+            </a:r>
+            <a:endParaRPr lang="en-US"/>
+          </a:p>
+        </p:txBody>
+      </p:sp>
+      <p:sp>
+        <p:nvSpPr>
+          <p:cNvPr id="18" name="timeline-node-2"/>
+          <p:cNvSpPr/>
+          <p:nvPr/>
+        </p:nvSpPr>
+        <p:spPr>
+          <a:xfrm xmlns:a="http://schemas.openxmlformats.org/drawingml/2006/main">
+            <a:off x="6210300" y="4610100"/>
+            <a:ext cx="304800" cy="304800"/>
+          </a:xfrm>
+          <a:prstGeom xmlns:a="http://schemas.openxmlformats.org/drawingml/2006/main" prst="ellipse">
+            <a:avLst/>
+          </a:prstGeom>
+          <a:solidFill xmlns:a="http://schemas.openxmlformats.org/drawingml/2006/main">
+            <a:srgbClr val="FFFFFF"/>
+          </a:solidFill>
+          <a:ln xmlns:a="http://schemas.openxmlformats.org/drawingml/2006/main" w="25400">
+            <a:solidFill>
+              <a:srgbClr val="181716"/>
+            </a:solidFill>
+            <a:prstDash val="solid"/>
+          </a:ln>
+        </p:spPr>
+        <p:txBody>
+          <a:bodyPr xmlns:a="http://schemas.openxmlformats.org/drawingml/2006/main" wrap="square" lIns="0" tIns="0" rIns="0" bIns="0" anchor="t"/>
+          <a:lstStyle xmlns:a="http://schemas.openxmlformats.org/drawingml/2006/main"/>
+          <a:p xmlns:a="http://schemas.openxmlformats.org/drawingml/2006/main">
+            <a:r>
+              <a:rPr lang="en-US"/>
+              <a:t/>
+            </a:r>
+            <a:endParaRPr lang="en-US"/>
+          </a:p>
+        </p:txBody>
+      </p:sp>
+      <p:sp>
+        <p:nvSpPr>
+          <p:cNvPr id="19" name="timeline-number-2"/>
+          <p:cNvSpPr txBox="1"/>
+          <p:nvPr/>
+        </p:nvSpPr>
+        <p:spPr>
+          <a:xfrm xmlns:a="http://schemas.openxmlformats.org/drawingml/2006/main">
+            <a:off x="6096000" y="4076700"/>
+            <a:ext cx="533400" cy="190500"/>
+          </a:xfrm>
+          <a:prstGeom xmlns:a="http://schemas.openxmlformats.org/drawingml/2006/main" prst="rect">
+            <a:avLst/>
+          </a:prstGeom>
+          <a:noFill xmlns:a="http://schemas.openxmlformats.org/drawingml/2006/main"/>
+          <a:ln xmlns:a="http://schemas.openxmlformats.org/drawingml/2006/main" w="0">
+            <a:noFill/>
+          </a:ln>
+        </p:spPr>
+        <p:txBody>
+          <a:bodyPr xmlns:a="http://schemas.openxmlformats.org/drawingml/2006/main" wrap="square" lIns="0" tIns="0" rIns="0" bIns="0" anchor="t"/>
+          <a:lstStyle xmlns:a="http://schemas.openxmlformats.org/drawingml/2006/main"/>
+          <a:p xmlns:a="http://schemas.openxmlformats.org/drawingml/2006/main">
+            <a:pPr algn="ctr"/>
+            <a:r>
+              <a:rPr lang="en-US" sz="975" b="1">
+                <a:solidFill>
+                  <a:srgbClr val="E2534B"/>
+                </a:solidFill>
+                <a:latin typeface="Arial"/>
+                <a:ea typeface="Arial"/>
+              </a:rPr>
+              <a:t>03</a:t>
+            </a:r>
+            <a:endParaRPr lang="en-US"/>
+          </a:p>
+        </p:txBody>
+      </p:sp>
+      <p:sp>
+        <p:nvSpPr>
+          <p:cNvPr id="20" name="timeline-label-2"/>
+          <p:cNvSpPr txBox="1"/>
+          <p:nvPr/>
+        </p:nvSpPr>
+        <p:spPr>
+          <a:xfrm xmlns:a="http://schemas.openxmlformats.org/drawingml/2006/main">
+            <a:off x="5676900" y="5086350"/>
+            <a:ext cx="1371600" cy="228600"/>
+          </a:xfrm>
+          <a:prstGeom xmlns:a="http://schemas.openxmlformats.org/drawingml/2006/main" prst="rect">
+            <a:avLst/>
+          </a:prstGeom>
+          <a:noFill xmlns:a="http://schemas.openxmlformats.org/drawingml/2006/main"/>
+          <a:ln xmlns:a="http://schemas.openxmlformats.org/drawingml/2006/main" w="0">
+            <a:noFill/>
+          </a:ln>
+        </p:spPr>
+        <p:txBody>
+          <a:bodyPr xmlns:a="http://schemas.openxmlformats.org/drawingml/2006/main" wrap="square" lIns="0" tIns="0" rIns="0" bIns="0" anchor="t"/>
+          <a:lstStyle xmlns:a="http://schemas.openxmlformats.org/drawingml/2006/main"/>
+          <a:p xmlns:a="http://schemas.openxmlformats.org/drawingml/2006/main">
+            <a:pPr algn="ctr"/>
+            <a:r>
+              <a:rPr lang="en-US" sz="1350" b="1">
+                <a:solidFill>
+                  <a:srgbClr val="181716"/>
+                </a:solidFill>
+                <a:latin typeface="Arial"/>
+                <a:ea typeface="Arial"/>
+              </a:rPr>
+              <a:t>Read</a:t>
+            </a:r>
+            <a:endParaRPr lang="en-US"/>
+          </a:p>
+        </p:txBody>
+      </p:sp>
+      <p:sp>
+        <p:nvSpPr>
+          <p:cNvPr id="21" name="timeline-text-2"/>
+          <p:cNvSpPr txBox="1"/>
+          <p:nvPr/>
+        </p:nvSpPr>
+        <p:spPr>
+          <a:xfrm xmlns:a="http://schemas.openxmlformats.org/drawingml/2006/main">
+            <a:off x="5467350" y="5391150"/>
+            <a:ext cx="1790700" cy="361950"/>
+          </a:xfrm>
+          <a:prstGeom xmlns:a="http://schemas.openxmlformats.org/drawingml/2006/main" prst="rect">
+            <a:avLst/>
+          </a:prstGeom>
+          <a:noFill xmlns:a="http://schemas.openxmlformats.org/drawingml/2006/main"/>
+          <a:ln xmlns:a="http://schemas.openxmlformats.org/drawingml/2006/main" w="0">
+            <a:noFill/>
+          </a:ln>
+        </p:spPr>
+        <p:txBody>
+          <a:bodyPr xmlns:a="http://schemas.openxmlformats.org/drawingml/2006/main" wrap="square" lIns="0" tIns="0" rIns="0" bIns="0" anchor="t"/>
+          <a:lstStyle xmlns:a="http://schemas.openxmlformats.org/drawingml/2006/main"/>
+          <a:p xmlns:a="http://schemas.openxmlformats.org/drawingml/2006/main">
+            <a:pPr algn="ctr"/>
+            <a:r>
+              <a:rPr lang="en-US" sz="1050">
+                <a:solidFill>
+                  <a:srgbClr val="90908F"/>
+                </a:solidFill>
+                <a:latin typeface="Arial"/>
+                <a:ea typeface="Arial"/>
+              </a:rPr>
+              <a:t>Separate signal</a:t>
+            </a:r>
+            <a:endParaRPr lang="en-US"/>
+          </a:p>
+        </p:txBody>
+      </p:sp>
+      <p:sp>
+        <p:nvSpPr>
+          <p:cNvPr id="22" name="timeline-node-3"/>
+          <p:cNvSpPr/>
+          <p:nvPr/>
+        </p:nvSpPr>
+        <p:spPr>
+          <a:xfrm xmlns:a="http://schemas.openxmlformats.org/drawingml/2006/main">
+            <a:off x="8782050" y="4610100"/>
+            <a:ext cx="304800" cy="304800"/>
+          </a:xfrm>
+          <a:prstGeom xmlns:a="http://schemas.openxmlformats.org/drawingml/2006/main" prst="ellipse">
+            <a:avLst/>
+          </a:prstGeom>
+          <a:solidFill xmlns:a="http://schemas.openxmlformats.org/drawingml/2006/main">
+            <a:srgbClr val="FFFFFF"/>
+          </a:solidFill>
+          <a:ln xmlns:a="http://schemas.openxmlformats.org/drawingml/2006/main" w="25400">
+            <a:solidFill>
+              <a:srgbClr val="181716"/>
+            </a:solidFill>
+            <a:prstDash val="solid"/>
+          </a:ln>
+        </p:spPr>
+        <p:txBody>
+          <a:bodyPr xmlns:a="http://schemas.openxmlformats.org/drawingml/2006/main" wrap="square" lIns="0" tIns="0" rIns="0" bIns="0" anchor="t"/>
+          <a:lstStyle xmlns:a="http://schemas.openxmlformats.org/drawingml/2006/main"/>
+          <a:p xmlns:a="http://schemas.openxmlformats.org/drawingml/2006/main">
+            <a:r>
+              <a:rPr lang="en-US"/>
+              <a:t/>
+            </a:r>
+            <a:endParaRPr lang="en-US"/>
+          </a:p>
+        </p:txBody>
+      </p:sp>
+      <p:sp>
+        <p:nvSpPr>
+          <p:cNvPr id="23" name="timeline-number-3"/>
+          <p:cNvSpPr txBox="1"/>
+          <p:nvPr/>
+        </p:nvSpPr>
+        <p:spPr>
+          <a:xfrm xmlns:a="http://schemas.openxmlformats.org/drawingml/2006/main">
+            <a:off x="8667750" y="4076700"/>
+            <a:ext cx="533400" cy="190500"/>
+          </a:xfrm>
+          <a:prstGeom xmlns:a="http://schemas.openxmlformats.org/drawingml/2006/main" prst="rect">
+            <a:avLst/>
+          </a:prstGeom>
+          <a:noFill xmlns:a="http://schemas.openxmlformats.org/drawingml/2006/main"/>
+          <a:ln xmlns:a="http://schemas.openxmlformats.org/drawingml/2006/main" w="0">
+            <a:noFill/>
+          </a:ln>
+        </p:spPr>
+        <p:txBody>
+          <a:bodyPr xmlns:a="http://schemas.openxmlformats.org/drawingml/2006/main" wrap="square" lIns="0" tIns="0" rIns="0" bIns="0" anchor="t"/>
+          <a:lstStyle xmlns:a="http://schemas.openxmlformats.org/drawingml/2006/main"/>
+          <a:p xmlns:a="http://schemas.openxmlformats.org/drawingml/2006/main">
+            <a:pPr algn="ctr"/>
+            <a:r>
+              <a:rPr lang="en-US" sz="975" b="1">
+                <a:solidFill>
+                  <a:srgbClr val="E2534B"/>
+                </a:solidFill>
+                <a:latin typeface="Arial"/>
+                <a:ea typeface="Arial"/>
+              </a:rPr>
+              <a:t>04</a:t>
+            </a:r>
+            <a:endParaRPr lang="en-US"/>
+          </a:p>
+        </p:txBody>
+      </p:sp>
+      <p:sp>
+        <p:nvSpPr>
+          <p:cNvPr id="24" name="timeline-label-3"/>
+          <p:cNvSpPr txBox="1"/>
+          <p:nvPr/>
+        </p:nvSpPr>
+        <p:spPr>
+          <a:xfrm xmlns:a="http://schemas.openxmlformats.org/drawingml/2006/main">
+            <a:off x="8248650" y="5086350"/>
+            <a:ext cx="1371600" cy="228600"/>
+          </a:xfrm>
+          <a:prstGeom xmlns:a="http://schemas.openxmlformats.org/drawingml/2006/main" prst="rect">
+            <a:avLst/>
+          </a:prstGeom>
+          <a:noFill xmlns:a="http://schemas.openxmlformats.org/drawingml/2006/main"/>
+          <a:ln xmlns:a="http://schemas.openxmlformats.org/drawingml/2006/main" w="0">
+            <a:noFill/>
+          </a:ln>
+        </p:spPr>
+        <p:txBody>
+          <a:bodyPr xmlns:a="http://schemas.openxmlformats.org/drawingml/2006/main" wrap="square" lIns="0" tIns="0" rIns="0" bIns="0" anchor="t"/>
+          <a:lstStyle xmlns:a="http://schemas.openxmlformats.org/drawingml/2006/main"/>
+          <a:p xmlns:a="http://schemas.openxmlformats.org/drawingml/2006/main">
+            <a:pPr algn="ctr"/>
+            <a:r>
+              <a:rPr lang="en-US" sz="1350" b="1">
+                <a:solidFill>
+                  <a:srgbClr val="181716"/>
+                </a:solidFill>
+                <a:latin typeface="Arial"/>
+                <a:ea typeface="Arial"/>
+              </a:rPr>
+              <a:t>Move</a:t>
+            </a:r>
+            <a:endParaRPr lang="en-US"/>
+          </a:p>
+        </p:txBody>
+      </p:sp>
+      <p:sp>
+        <p:nvSpPr>
+          <p:cNvPr id="25" name="timeline-text-3"/>
+          <p:cNvSpPr txBox="1"/>
+          <p:nvPr/>
+        </p:nvSpPr>
+        <p:spPr>
+          <a:xfrm xmlns:a="http://schemas.openxmlformats.org/drawingml/2006/main">
+            <a:off x="8039100" y="5391150"/>
+            <a:ext cx="1790700" cy="361950"/>
+          </a:xfrm>
+          <a:prstGeom xmlns:a="http://schemas.openxmlformats.org/drawingml/2006/main" prst="rect">
+            <a:avLst/>
+          </a:prstGeom>
+          <a:noFill xmlns:a="http://schemas.openxmlformats.org/drawingml/2006/main"/>
+          <a:ln xmlns:a="http://schemas.openxmlformats.org/drawingml/2006/main" w="0">
+            <a:noFill/>
+          </a:ln>
+        </p:spPr>
+        <p:txBody>
+          <a:bodyPr xmlns:a="http://schemas.openxmlformats.org/drawingml/2006/main" wrap="square" lIns="0" tIns="0" rIns="0" bIns="0" anchor="t"/>
+          <a:lstStyle xmlns:a="http://schemas.openxmlformats.org/drawingml/2006/main"/>
+          <a:p xmlns:a="http://schemas.openxmlformats.org/drawingml/2006/main">
+            <a:pPr algn="ctr"/>
+            <a:r>
+              <a:rPr lang="en-US" sz="1050">
+                <a:solidFill>
+                  <a:srgbClr val="90908F"/>
+                </a:solidFill>
+                <a:latin typeface="Arial"/>
+                <a:ea typeface="Arial"/>
+              </a:rPr>
+              <a:t>Set the next gate</a:t>
+            </a:r>
+            <a:endParaRPr lang="en-US"/>
+          </a:p>
+        </p:txBody>
+      </p:sp>
+      <p:sp>
+        <p:nvSpPr>
+          <p:cNvPr id="26" name="timeline-node-4"/>
+          <p:cNvSpPr/>
+          <p:nvPr/>
+        </p:nvSpPr>
+        <p:spPr>
+          <a:xfrm xmlns:a="http://schemas.openxmlformats.org/drawingml/2006/main">
+            <a:off x="11353800" y="4610100"/>
+            <a:ext cx="304800" cy="304800"/>
+          </a:xfrm>
+          <a:prstGeom xmlns:a="http://schemas.openxmlformats.org/drawingml/2006/main" prst="ellipse">
+            <a:avLst/>
+          </a:prstGeom>
+          <a:solidFill xmlns:a="http://schemas.openxmlformats.org/drawingml/2006/main">
+            <a:srgbClr val="E2534B"/>
+          </a:solidFill>
+          <a:ln xmlns:a="http://schemas.openxmlformats.org/drawingml/2006/main" w="25400">
             <a:solidFill>
               <a:srgbClr val="E2534B"/>
             </a:solidFill>
@@ -2433,14 +2786,128 @@
       </p:sp>
       <p:sp>
         <p:nvSpPr>
-          <p:cNvPr id="11" name="dense-read-label"/>
-          <p:cNvSpPr txBox="1"/>
-          <p:nvPr/>
-        </p:nvSpPr>
-        <p:spPr>
-          <a:xfrm xmlns:a="http://schemas.openxmlformats.org/drawingml/2006/main">
-            <a:off x="11315700" y="3543300"/>
-            <a:ext cx="2667000" cy="209550"/>
+          <p:cNvPr id="27" name="timeline-number-4"/>
+          <p:cNvSpPr txBox="1"/>
+          <p:nvPr/>
+        </p:nvSpPr>
+        <p:spPr>
+          <a:xfrm xmlns:a="http://schemas.openxmlformats.org/drawingml/2006/main">
+            <a:off x="11239500" y="4076700"/>
+            <a:ext cx="533400" cy="190500"/>
+          </a:xfrm>
+          <a:prstGeom xmlns:a="http://schemas.openxmlformats.org/drawingml/2006/main" prst="rect">
+            <a:avLst/>
+          </a:prstGeom>
+          <a:noFill xmlns:a="http://schemas.openxmlformats.org/drawingml/2006/main"/>
+          <a:ln xmlns:a="http://schemas.openxmlformats.org/drawingml/2006/main" w="0">
+            <a:noFill/>
+          </a:ln>
+        </p:spPr>
+        <p:txBody>
+          <a:bodyPr xmlns:a="http://schemas.openxmlformats.org/drawingml/2006/main" wrap="square" lIns="0" tIns="0" rIns="0" bIns="0" anchor="t"/>
+          <a:lstStyle xmlns:a="http://schemas.openxmlformats.org/drawingml/2006/main"/>
+          <a:p xmlns:a="http://schemas.openxmlformats.org/drawingml/2006/main">
+            <a:pPr algn="ctr"/>
+            <a:r>
+              <a:rPr lang="en-US" sz="975" b="1">
+                <a:solidFill>
+                  <a:srgbClr val="E2534B"/>
+                </a:solidFill>
+                <a:latin typeface="Arial"/>
+                <a:ea typeface="Arial"/>
+              </a:rPr>
+              <a:t>05</a:t>
+            </a:r>
+            <a:endParaRPr lang="en-US"/>
+          </a:p>
+        </p:txBody>
+      </p:sp>
+      <p:sp>
+        <p:nvSpPr>
+          <p:cNvPr id="28" name="timeline-label-4"/>
+          <p:cNvSpPr txBox="1"/>
+          <p:nvPr/>
+        </p:nvSpPr>
+        <p:spPr>
+          <a:xfrm xmlns:a="http://schemas.openxmlformats.org/drawingml/2006/main">
+            <a:off x="10820400" y="5086350"/>
+            <a:ext cx="1371600" cy="228600"/>
+          </a:xfrm>
+          <a:prstGeom xmlns:a="http://schemas.openxmlformats.org/drawingml/2006/main" prst="rect">
+            <a:avLst/>
+          </a:prstGeom>
+          <a:noFill xmlns:a="http://schemas.openxmlformats.org/drawingml/2006/main"/>
+          <a:ln xmlns:a="http://schemas.openxmlformats.org/drawingml/2006/main" w="0">
+            <a:noFill/>
+          </a:ln>
+        </p:spPr>
+        <p:txBody>
+          <a:bodyPr xmlns:a="http://schemas.openxmlformats.org/drawingml/2006/main" wrap="square" lIns="0" tIns="0" rIns="0" bIns="0" anchor="t"/>
+          <a:lstStyle xmlns:a="http://schemas.openxmlformats.org/drawingml/2006/main"/>
+          <a:p xmlns:a="http://schemas.openxmlformats.org/drawingml/2006/main">
+            <a:pPr algn="ctr"/>
+            <a:r>
+              <a:rPr lang="en-US" sz="1350" b="1">
+                <a:solidFill>
+                  <a:srgbClr val="181716"/>
+                </a:solidFill>
+                <a:latin typeface="Arial"/>
+                <a:ea typeface="Arial"/>
+              </a:rPr>
+              <a:t>Scale</a:t>
+            </a:r>
+            <a:endParaRPr lang="en-US"/>
+          </a:p>
+        </p:txBody>
+      </p:sp>
+      <p:sp>
+        <p:nvSpPr>
+          <p:cNvPr id="29" name="timeline-text-4"/>
+          <p:cNvSpPr txBox="1"/>
+          <p:nvPr/>
+        </p:nvSpPr>
+        <p:spPr>
+          <a:xfrm xmlns:a="http://schemas.openxmlformats.org/drawingml/2006/main">
+            <a:off x="10610850" y="5391150"/>
+            <a:ext cx="1790700" cy="361950"/>
+          </a:xfrm>
+          <a:prstGeom xmlns:a="http://schemas.openxmlformats.org/drawingml/2006/main" prst="rect">
+            <a:avLst/>
+          </a:prstGeom>
+          <a:noFill xmlns:a="http://schemas.openxmlformats.org/drawingml/2006/main"/>
+          <a:ln xmlns:a="http://schemas.openxmlformats.org/drawingml/2006/main" w="0">
+            <a:noFill/>
+          </a:ln>
+        </p:spPr>
+        <p:txBody>
+          <a:bodyPr xmlns:a="http://schemas.openxmlformats.org/drawingml/2006/main" wrap="square" lIns="0" tIns="0" rIns="0" bIns="0" anchor="t"/>
+          <a:lstStyle xmlns:a="http://schemas.openxmlformats.org/drawingml/2006/main"/>
+          <a:p xmlns:a="http://schemas.openxmlformats.org/drawingml/2006/main">
+            <a:pPr algn="ctr"/>
+            <a:r>
+              <a:rPr lang="en-US" sz="1050">
+                <a:solidFill>
+                  <a:srgbClr val="90908F"/>
+                </a:solidFill>
+                <a:latin typeface="Arial"/>
+                <a:ea typeface="Arial"/>
+              </a:rPr>
+              <a:t>Repeat what held</a:t>
+            </a:r>
+            <a:endParaRPr lang="en-US"/>
+          </a:p>
+        </p:txBody>
+      </p:sp>
+      <p:sp>
+        <p:nvSpPr>
+          <p:cNvPr id="30" name="timeline-read-label"/>
+          <p:cNvSpPr txBox="1"/>
+          <p:nvPr/>
+        </p:nvSpPr>
+        <p:spPr>
+          <a:xfrm xmlns:a="http://schemas.openxmlformats.org/drawingml/2006/main">
+            <a:off x="1066800" y="6667500"/>
+            <a:ext cx="2286000" cy="209550"/>
           </a:xfrm>
           <a:prstGeom xmlns:a="http://schemas.openxmlformats.org/drawingml/2006/main" prst="rect">
             <a:avLst/>
@@ -2470,81 +2937,44 @@
       </p:sp>
       <p:sp>
         <p:nvSpPr>
-          <p:cNvPr id="12" name="dense-read-title"/>
-          <p:cNvSpPr txBox="1"/>
-          <p:nvPr/>
-        </p:nvSpPr>
-        <p:spPr>
-          <a:xfrm xmlns:a="http://schemas.openxmlformats.org/drawingml/2006/main">
-            <a:off x="11315700" y="4000500"/>
-            <a:ext cx="2667000" cy="685800"/>
-          </a:xfrm>
-          <a:prstGeom xmlns:a="http://schemas.openxmlformats.org/drawingml/2006/main" prst="rect">
-            <a:avLst/>
-          </a:prstGeom>
-          <a:noFill xmlns:a="http://schemas.openxmlformats.org/drawingml/2006/main"/>
-          <a:ln xmlns:a="http://schemas.openxmlformats.org/drawingml/2006/main" w="0">
-            <a:noFill/>
-          </a:ln>
-        </p:spPr>
-        <p:txBody>
-          <a:bodyPr xmlns:a="http://schemas.openxmlformats.org/drawingml/2006/main" wrap="square" lIns="0" tIns="0" rIns="0" bIns="0" anchor="t"/>
-          <a:lstStyle xmlns:a="http://schemas.openxmlformats.org/drawingml/2006/main"/>
-          <a:p xmlns:a="http://schemas.openxmlformats.org/drawingml/2006/main">
-            <a:r>
-              <a:rPr lang="en-US" sz="1725" b="1">
+          <p:cNvPr id="31" name="timeline-read"/>
+          <p:cNvSpPr txBox="1"/>
+          <p:nvPr/>
+        </p:nvSpPr>
+        <p:spPr>
+          <a:xfrm xmlns:a="http://schemas.openxmlformats.org/drawingml/2006/main">
+            <a:off x="3333750" y="6629400"/>
+            <a:ext cx="8191500" cy="266700"/>
+          </a:xfrm>
+          <a:prstGeom xmlns:a="http://schemas.openxmlformats.org/drawingml/2006/main" prst="rect">
+            <a:avLst/>
+          </a:prstGeom>
+          <a:noFill xmlns:a="http://schemas.openxmlformats.org/drawingml/2006/main"/>
+          <a:ln xmlns:a="http://schemas.openxmlformats.org/drawingml/2006/main" w="0">
+            <a:noFill/>
+          </a:ln>
+        </p:spPr>
+        <p:txBody>
+          <a:bodyPr xmlns:a="http://schemas.openxmlformats.org/drawingml/2006/main" wrap="square" lIns="0" tIns="0" rIns="0" bIns="0" anchor="t"/>
+          <a:lstStyle xmlns:a="http://schemas.openxmlformats.org/drawingml/2006/main"/>
+          <a:p xmlns:a="http://schemas.openxmlformats.org/drawingml/2006/main">
+            <a:r>
+              <a:rPr lang="en-US" sz="1425" b="1">
                 <a:solidFill>
                   <a:srgbClr val="181716"/>
                 </a:solidFill>
                 <a:latin typeface="Arial"/>
                 <a:ea typeface="Arial"/>
               </a:rPr>
-              <a:t>The comparison narrows the move.</a:t>
-            </a:r>
-            <a:endParaRPr lang="en-US"/>
-          </a:p>
-        </p:txBody>
-      </p:sp>
-      <p:sp>
-        <p:nvSpPr>
-          <p:cNvPr id="13" name="dense-read-body"/>
-          <p:cNvSpPr txBox="1"/>
-          <p:nvPr/>
-        </p:nvSpPr>
-        <p:spPr>
-          <a:xfrm xmlns:a="http://schemas.openxmlformats.org/drawingml/2006/main">
-            <a:off x="11315700" y="4953000"/>
-            <a:ext cx="2667000" cy="819150"/>
-          </a:xfrm>
-          <a:prstGeom xmlns:a="http://schemas.openxmlformats.org/drawingml/2006/main" prst="rect">
-            <a:avLst/>
-          </a:prstGeom>
-          <a:noFill xmlns:a="http://schemas.openxmlformats.org/drawingml/2006/main"/>
-          <a:ln xmlns:a="http://schemas.openxmlformats.org/drawingml/2006/main" w="0">
-            <a:noFill/>
-          </a:ln>
-        </p:spPr>
-        <p:txBody>
-          <a:bodyPr xmlns:a="http://schemas.openxmlformats.org/drawingml/2006/main" wrap="square" lIns="0" tIns="0" rIns="0" bIns="0" anchor="t"/>
-          <a:lstStyle xmlns:a="http://schemas.openxmlformats.org/drawingml/2006/main"/>
-          <a:p xmlns:a="http://schemas.openxmlformats.org/drawingml/2006/main">
-            <a:r>
-              <a:rPr lang="en-US" sz="1200">
-                <a:solidFill>
-                  <a:srgbClr val="90908F"/>
-                </a:solidFill>
-                <a:latin typeface="Arial"/>
-                <a:ea typeface="Arial"/>
-              </a:rPr>
-              <a:t>Locate the constraint; choose the lever.</a:t>
-            </a:r>
-            <a:endParaRPr lang="en-US"/>
-          </a:p>
-        </p:txBody>
-      </p:sp>
-      <p:sp>
-        <p:nvSpPr>
-          <p:cNvPr id="14" name="evidence-band"/>
+              <a:t>A sequence is useful when each handoff changes what can happen next.</a:t>
+            </a:r>
+            <a:endParaRPr lang="en-US"/>
+          </a:p>
+        </p:txBody>
+      </p:sp>
+      <p:sp>
+        <p:nvSpPr>
+          <p:cNvPr id="32" name="evidence-band"/>
           <p:cNvSpPr/>
           <p:nvPr/>
         </p:nvSpPr>
@@ -2580,7 +3010,7 @@
       </p:sp>
       <p:sp>
         <p:nvSpPr>
-          <p:cNvPr id="15" name="evidence-band-text"/>
+          <p:cNvPr id="33" name="evidence-band-text"/>
           <p:cNvSpPr txBox="1"/>
           <p:nvPr/>
         </p:nvSpPr>
@@ -2617,7 +3047,7 @@
       </p:sp>
       <p:sp>
         <p:nvSpPr>
-          <p:cNvPr id="16" name="source"/>
+          <p:cNvPr id="34" name="source"/>
           <p:cNvSpPr txBox="1"/>
           <p:nvPr/>
         </p:nvSpPr>
@@ -2654,7 +3084,7 @@
       </p:sp>
       <p:sp>
         <p:nvSpPr>
-          <p:cNvPr id="17" name="page-number"/>
+          <p:cNvPr id="35" name="page-number"/>
           <p:cNvSpPr txBox="1"/>
           <p:nvPr/>
         </p:nvSpPr>
